--- a/스크립트언어/2021182014 박신우 숙제1.pptx
+++ b/스크립트언어/2021182014 박신우 숙제1.pptx
@@ -5,7 +5,7 @@
     <p:sldMasterId id="2147483684" r:id="rId1"/>
   </p:sldMasterIdLst>
   <p:notesMasterIdLst>
-    <p:notesMasterId r:id="rId17"/>
+    <p:notesMasterId r:id="rId19"/>
   </p:notesMasterIdLst>
   <p:sldIdLst>
     <p:sldId id="258" r:id="rId2"/>
@@ -21,8 +21,10 @@
     <p:sldId id="339" r:id="rId12"/>
     <p:sldId id="346" r:id="rId13"/>
     <p:sldId id="340" r:id="rId14"/>
-    <p:sldId id="341" r:id="rId15"/>
-    <p:sldId id="342" r:id="rId16"/>
+    <p:sldId id="347" r:id="rId15"/>
+    <p:sldId id="341" r:id="rId16"/>
+    <p:sldId id="342" r:id="rId17"/>
+    <p:sldId id="348" r:id="rId18"/>
   </p:sldIdLst>
   <p:sldSz cx="9144000" cy="6858000" type="screen4x3"/>
   <p:notesSz cx="6796088" cy="9926638"/>
@@ -282,7 +284,7 @@
               <a:pPr>
                 <a:defRPr/>
               </a:pPr>
-              <a:t>2026-03-09</a:t>
+              <a:t>2026-03-12</a:t>
             </a:fld>
             <a:endParaRPr lang="ko-KR" altLang="en-US"/>
           </a:p>
@@ -972,7 +974,7 @@
               <a:pPr>
                 <a:defRPr/>
               </a:pPr>
-              <a:t>14</a:t>
+              <a:t>15</a:t>
             </a:fld>
             <a:endParaRPr lang="ko-KR" altLang="en-US"/>
           </a:p>
@@ -1086,7 +1088,7 @@
               <a:pPr>
                 <a:defRPr/>
               </a:pPr>
-              <a:t>15</a:t>
+              <a:t>16</a:t>
             </a:fld>
             <a:endParaRPr lang="ko-KR" altLang="en-US"/>
           </a:p>
@@ -7298,31 +7300,6 @@
           </a:prstGeom>
         </p:spPr>
       </p:pic>
-      <p:sp>
-        <p:nvSpPr>
-          <p:cNvPr id="10" name="내용 개체 틀 9">
-            <a:extLst>
-              <a:ext uri="{FF2B5EF4-FFF2-40B4-BE49-F238E27FC236}">
-                <a16:creationId xmlns:a16="http://schemas.microsoft.com/office/drawing/2014/main" id="{8B85BF86-669B-7400-FDB9-D7AAB364B2A6}"/>
-              </a:ext>
-            </a:extLst>
-          </p:cNvPr>
-          <p:cNvSpPr>
-            <a:spLocks noGrp="1"/>
-          </p:cNvSpPr>
-          <p:nvPr>
-            <p:ph idx="1"/>
-          </p:nvPr>
-        </p:nvSpPr>
-        <p:spPr/>
-        <p:txBody>
-          <a:bodyPr/>
-          <a:lstStyle/>
-          <a:p>
-            <a:endParaRPr lang="ko-KR" altLang="en-US" dirty="0"/>
-          </a:p>
-        </p:txBody>
-      </p:sp>
       <p:pic>
         <p:nvPicPr>
           <p:cNvPr id="12" name="그림 11">
@@ -8352,6 +8329,277 @@
   <p:cSld>
     <p:spTree>
       <p:nvGrpSpPr>
+        <p:cNvPr id="1" name=""/>
+        <p:cNvGrpSpPr/>
+        <p:nvPr/>
+      </p:nvGrpSpPr>
+      <p:grpSpPr>
+        <a:xfrm>
+          <a:off x="0" y="0"/>
+          <a:ext cx="0" cy="0"/>
+          <a:chOff x="0" y="0"/>
+          <a:chExt cx="0" cy="0"/>
+        </a:xfrm>
+      </p:grpSpPr>
+      <p:sp>
+        <p:nvSpPr>
+          <p:cNvPr id="2" name="제목 1">
+            <a:extLst>
+              <a:ext uri="{FF2B5EF4-FFF2-40B4-BE49-F238E27FC236}">
+                <a16:creationId xmlns:a16="http://schemas.microsoft.com/office/drawing/2014/main" id="{5596CB9C-BC32-6E90-1E07-7B1CF37B3B34}"/>
+              </a:ext>
+            </a:extLst>
+          </p:cNvPr>
+          <p:cNvSpPr>
+            <a:spLocks noGrp="1"/>
+          </p:cNvSpPr>
+          <p:nvPr>
+            <p:ph type="title"/>
+          </p:nvPr>
+        </p:nvSpPr>
+        <p:spPr>
+          <a:xfrm>
+            <a:off x="457200" y="274638"/>
+            <a:ext cx="8229600" cy="365125"/>
+          </a:xfrm>
+        </p:spPr>
+        <p:txBody>
+          <a:bodyPr/>
+          <a:lstStyle/>
+          <a:p>
+            <a:r>
+              <a:rPr lang="en-US" altLang="ko-KR" dirty="0"/>
+              <a:t>5. </a:t>
+            </a:r>
+            <a:r>
+              <a:rPr lang="ko-KR" altLang="en-US" dirty="0" err="1"/>
+              <a:t>십자말</a:t>
+            </a:r>
+            <a:r>
+              <a:rPr lang="ko-KR" altLang="en-US" dirty="0"/>
+              <a:t> 풀이 </a:t>
+            </a:r>
+            <a:r>
+              <a:rPr lang="en-US" altLang="ko-KR" dirty="0"/>
+              <a:t>(</a:t>
+            </a:r>
+            <a:r>
+              <a:rPr lang="en-US" altLang="ko-KR" dirty="0" err="1"/>
+              <a:t>TUKorea</a:t>
+            </a:r>
+            <a:r>
+              <a:rPr lang="en-US" altLang="ko-KR" dirty="0"/>
+              <a:t>)</a:t>
+            </a:r>
+            <a:endParaRPr lang="ko-KR" altLang="en-US" dirty="0"/>
+          </a:p>
+        </p:txBody>
+      </p:sp>
+      <p:pic>
+        <p:nvPicPr>
+          <p:cNvPr id="7" name="내용 개체 틀 6">
+            <a:extLst>
+              <a:ext uri="{FF2B5EF4-FFF2-40B4-BE49-F238E27FC236}">
+                <a16:creationId xmlns:a16="http://schemas.microsoft.com/office/drawing/2014/main" id="{F5FED792-C6C8-01EA-3C20-BDC1C7455B47}"/>
+              </a:ext>
+            </a:extLst>
+          </p:cNvPr>
+          <p:cNvPicPr>
+            <a:picLocks noGrp="1" noChangeAspect="1"/>
+          </p:cNvPicPr>
+          <p:nvPr>
+            <p:ph idx="1"/>
+          </p:nvPr>
+        </p:nvPicPr>
+        <p:blipFill>
+          <a:blip r:embed="rId2"/>
+          <a:stretch>
+            <a:fillRect/>
+          </a:stretch>
+        </p:blipFill>
+        <p:spPr bwMode="auto">
+          <a:xfrm>
+            <a:off x="463285" y="1988840"/>
+            <a:ext cx="4460081" cy="2232247"/>
+          </a:xfrm>
+          <a:prstGeom prst="rect">
+            <a:avLst/>
+          </a:prstGeom>
+          <a:noFill/>
+          <a:ln>
+            <a:noFill/>
+          </a:ln>
+          <a:extLst>
+            <a:ext uri="{909E8E84-426E-40DD-AFC4-6F175D3DCCD1}">
+              <a14:hiddenFill xmlns:a14="http://schemas.microsoft.com/office/drawing/2010/main">
+                <a:solidFill>
+                  <a:srgbClr val="FFFFFF"/>
+                </a:solidFill>
+              </a14:hiddenFill>
+            </a:ext>
+            <a:ext uri="{91240B29-F687-4F45-9708-019B960494DF}">
+              <a14:hiddenLine xmlns:a14="http://schemas.microsoft.com/office/drawing/2010/main" w="9525">
+                <a:solidFill>
+                  <a:srgbClr val="000000"/>
+                </a:solidFill>
+                <a:miter lim="800000"/>
+                <a:headEnd/>
+                <a:tailEnd/>
+              </a14:hiddenLine>
+            </a:ext>
+          </a:extLst>
+        </p:spPr>
+      </p:pic>
+      <p:sp>
+        <p:nvSpPr>
+          <p:cNvPr id="4" name="날짜 개체 틀 3">
+            <a:extLst>
+              <a:ext uri="{FF2B5EF4-FFF2-40B4-BE49-F238E27FC236}">
+                <a16:creationId xmlns:a16="http://schemas.microsoft.com/office/drawing/2014/main" id="{BB88265D-3E10-F39E-DD7E-5C7BA0F0F837}"/>
+              </a:ext>
+            </a:extLst>
+          </p:cNvPr>
+          <p:cNvSpPr>
+            <a:spLocks noGrp="1"/>
+          </p:cNvSpPr>
+          <p:nvPr>
+            <p:ph type="dt" sz="half" idx="10"/>
+          </p:nvPr>
+        </p:nvSpPr>
+        <p:spPr/>
+        <p:txBody>
+          <a:bodyPr/>
+          <a:lstStyle/>
+          <a:p>
+            <a:pPr>
+              <a:defRPr/>
+            </a:pPr>
+            <a:r>
+              <a:rPr lang="en-US" altLang="ko-KR"/>
+              <a:t>2008</a:t>
+            </a:r>
+            <a:r>
+              <a:rPr lang="ko-KR" altLang="en-US"/>
+              <a:t>년</a:t>
+            </a:r>
+            <a:r>
+              <a:rPr lang="en-US" altLang="ko-KR"/>
+              <a:t>2</a:t>
+            </a:r>
+            <a:r>
+              <a:rPr lang="ko-KR" altLang="en-US"/>
+              <a:t>학기 </a:t>
+            </a:r>
+            <a:r>
+              <a:rPr lang="en-US" altLang="ko-KR"/>
+              <a:t>3D</a:t>
+            </a:r>
+            <a:r>
+              <a:rPr lang="ko-KR" altLang="en-US"/>
+              <a:t>게임프로그래밍</a:t>
+            </a:r>
+            <a:r>
+              <a:rPr lang="en-US" altLang="ko-KR"/>
+              <a:t>II </a:t>
+            </a:r>
+            <a:r>
+              <a:rPr lang="ko-KR" altLang="en-US"/>
+              <a:t>담당교수</a:t>
+            </a:r>
+            <a:r>
+              <a:rPr lang="en-US" altLang="ko-KR"/>
+              <a:t>:</a:t>
+            </a:r>
+            <a:r>
+              <a:rPr lang="ko-KR" altLang="en-US"/>
+              <a:t>김영식</a:t>
+            </a:r>
+          </a:p>
+        </p:txBody>
+      </p:sp>
+      <p:sp>
+        <p:nvSpPr>
+          <p:cNvPr id="5" name="슬라이드 번호 개체 틀 4">
+            <a:extLst>
+              <a:ext uri="{FF2B5EF4-FFF2-40B4-BE49-F238E27FC236}">
+                <a16:creationId xmlns:a16="http://schemas.microsoft.com/office/drawing/2014/main" id="{9EA6E29A-FE43-1391-5251-4C7B26713664}"/>
+              </a:ext>
+            </a:extLst>
+          </p:cNvPr>
+          <p:cNvSpPr>
+            <a:spLocks noGrp="1"/>
+          </p:cNvSpPr>
+          <p:nvPr>
+            <p:ph type="sldNum" sz="quarter" idx="12"/>
+          </p:nvPr>
+        </p:nvSpPr>
+        <p:spPr/>
+        <p:txBody>
+          <a:bodyPr/>
+          <a:lstStyle/>
+          <a:p>
+            <a:pPr>
+              <a:defRPr/>
+            </a:pPr>
+            <a:fld id="{A268DA64-E15D-4814-A1DA-86D92D550423}" type="slidenum">
+              <a:rPr lang="ko-KR" altLang="en-US" smtClean="0"/>
+              <a:pPr>
+                <a:defRPr/>
+              </a:pPr>
+              <a:t>14</a:t>
+            </a:fld>
+            <a:endParaRPr lang="ko-KR" altLang="en-US"/>
+          </a:p>
+        </p:txBody>
+      </p:sp>
+      <p:pic>
+        <p:nvPicPr>
+          <p:cNvPr id="9" name="그림 8">
+            <a:extLst>
+              <a:ext uri="{FF2B5EF4-FFF2-40B4-BE49-F238E27FC236}">
+                <a16:creationId xmlns:a16="http://schemas.microsoft.com/office/drawing/2014/main" id="{E526E5E4-F785-0E5E-2B73-05DC35B5B811}"/>
+              </a:ext>
+            </a:extLst>
+          </p:cNvPr>
+          <p:cNvPicPr>
+            <a:picLocks noChangeAspect="1"/>
+          </p:cNvPicPr>
+          <p:nvPr/>
+        </p:nvPicPr>
+        <p:blipFill>
+          <a:blip r:embed="rId3"/>
+          <a:stretch>
+            <a:fillRect/>
+          </a:stretch>
+        </p:blipFill>
+        <p:spPr>
+          <a:xfrm>
+            <a:off x="5148064" y="994420"/>
+            <a:ext cx="3372104" cy="4869160"/>
+          </a:xfrm>
+          <a:prstGeom prst="rect">
+            <a:avLst/>
+          </a:prstGeom>
+        </p:spPr>
+      </p:pic>
+    </p:spTree>
+    <p:extLst>
+      <p:ext uri="{BB962C8B-B14F-4D97-AF65-F5344CB8AC3E}">
+        <p14:creationId xmlns:p14="http://schemas.microsoft.com/office/powerpoint/2010/main" val="2646447110"/>
+      </p:ext>
+    </p:extLst>
+  </p:cSld>
+  <p:clrMapOvr>
+    <a:masterClrMapping/>
+  </p:clrMapOvr>
+</p:sld>
+</file>
+
+<file path=ppt/slides/slide15.xml><?xml version="1.0" encoding="utf-8"?>
+<p:sld xmlns:a="http://schemas.openxmlformats.org/drawingml/2006/main" xmlns:r="http://schemas.openxmlformats.org/officeDocument/2006/relationships" xmlns:p="http://schemas.openxmlformats.org/presentationml/2006/main">
+  <p:cSld>
+    <p:spTree>
+      <p:nvGrpSpPr>
         <p:cNvPr id="1" name="">
           <a:extLst>
             <a:ext uri="{FF2B5EF4-FFF2-40B4-BE49-F238E27FC236}">
@@ -8443,7 +8691,7 @@
               <a:pPr>
                 <a:defRPr/>
               </a:pPr>
-              <a:t>14</a:t>
+              <a:t>15</a:t>
             </a:fld>
             <a:endParaRPr lang="ko-KR" altLang="en-US"/>
           </a:p>
@@ -8609,7 +8857,7 @@
 </p:sld>
 </file>
 
-<file path=ppt/slides/slide15.xml><?xml version="1.0" encoding="utf-8"?>
+<file path=ppt/slides/slide16.xml><?xml version="1.0" encoding="utf-8"?>
 <p:sld xmlns:a="http://schemas.openxmlformats.org/drawingml/2006/main" xmlns:r="http://schemas.openxmlformats.org/officeDocument/2006/relationships" xmlns:p="http://schemas.openxmlformats.org/presentationml/2006/main">
   <p:cSld>
     <p:spTree>
@@ -8705,7 +8953,7 @@
               <a:pPr>
                 <a:defRPr/>
               </a:pPr>
-              <a:t>15</a:t>
+              <a:t>16</a:t>
             </a:fld>
             <a:endParaRPr lang="ko-KR" altLang="en-US"/>
           </a:p>
@@ -8862,6 +9110,265 @@
     <p:extLst>
       <p:ext uri="{BB962C8B-B14F-4D97-AF65-F5344CB8AC3E}">
         <p14:creationId xmlns:p14="http://schemas.microsoft.com/office/powerpoint/2010/main" val="2657514269"/>
+      </p:ext>
+    </p:extLst>
+  </p:cSld>
+  <p:clrMapOvr>
+    <a:masterClrMapping/>
+  </p:clrMapOvr>
+</p:sld>
+</file>
+
+<file path=ppt/slides/slide17.xml><?xml version="1.0" encoding="utf-8"?>
+<p:sld xmlns:a="http://schemas.openxmlformats.org/drawingml/2006/main" xmlns:r="http://schemas.openxmlformats.org/officeDocument/2006/relationships" xmlns:p="http://schemas.openxmlformats.org/presentationml/2006/main">
+  <p:cSld>
+    <p:spTree>
+      <p:nvGrpSpPr>
+        <p:cNvPr id="1" name=""/>
+        <p:cNvGrpSpPr/>
+        <p:nvPr/>
+      </p:nvGrpSpPr>
+      <p:grpSpPr>
+        <a:xfrm>
+          <a:off x="0" y="0"/>
+          <a:ext cx="0" cy="0"/>
+          <a:chOff x="0" y="0"/>
+          <a:chExt cx="0" cy="0"/>
+        </a:xfrm>
+      </p:grpSpPr>
+      <p:sp>
+        <p:nvSpPr>
+          <p:cNvPr id="2" name="제목 1">
+            <a:extLst>
+              <a:ext uri="{FF2B5EF4-FFF2-40B4-BE49-F238E27FC236}">
+                <a16:creationId xmlns:a16="http://schemas.microsoft.com/office/drawing/2014/main" id="{BFA1E612-813C-5653-B8DF-3E94BBD9A521}"/>
+              </a:ext>
+            </a:extLst>
+          </p:cNvPr>
+          <p:cNvSpPr>
+            <a:spLocks noGrp="1"/>
+          </p:cNvSpPr>
+          <p:nvPr>
+            <p:ph type="title"/>
+          </p:nvPr>
+        </p:nvSpPr>
+        <p:spPr>
+          <a:xfrm>
+            <a:off x="457200" y="274638"/>
+            <a:ext cx="8229600" cy="490066"/>
+          </a:xfrm>
+        </p:spPr>
+        <p:txBody>
+          <a:bodyPr/>
+          <a:lstStyle/>
+          <a:p>
+            <a:r>
+              <a:rPr lang="en-US" altLang="ko-KR" dirty="0"/>
+              <a:t>6. </a:t>
+            </a:r>
+            <a:r>
+              <a:rPr lang="ko-KR" altLang="en-US" dirty="0"/>
+              <a:t>다트게임</a:t>
+            </a:r>
+            <a:r>
+              <a:rPr lang="en-US" altLang="ko-KR" dirty="0"/>
+              <a:t>(Programmers) </a:t>
+            </a:r>
+            <a:endParaRPr lang="ko-KR" altLang="en-US" dirty="0"/>
+          </a:p>
+        </p:txBody>
+      </p:sp>
+      <p:pic>
+        <p:nvPicPr>
+          <p:cNvPr id="7" name="내용 개체 틀 6">
+            <a:extLst>
+              <a:ext uri="{FF2B5EF4-FFF2-40B4-BE49-F238E27FC236}">
+                <a16:creationId xmlns:a16="http://schemas.microsoft.com/office/drawing/2014/main" id="{102BD604-8B1C-EA52-9C21-A6007B1F77D7}"/>
+              </a:ext>
+            </a:extLst>
+          </p:cNvPr>
+          <p:cNvPicPr>
+            <a:picLocks noGrp="1" noChangeAspect="1"/>
+          </p:cNvPicPr>
+          <p:nvPr>
+            <p:ph idx="1"/>
+          </p:nvPr>
+        </p:nvPicPr>
+        <p:blipFill>
+          <a:blip r:embed="rId2"/>
+          <a:stretch>
+            <a:fillRect/>
+          </a:stretch>
+        </p:blipFill>
+        <p:spPr bwMode="auto">
+          <a:xfrm>
+            <a:off x="755576" y="980728"/>
+            <a:ext cx="2592288" cy="5109338"/>
+          </a:xfrm>
+          <a:prstGeom prst="rect">
+            <a:avLst/>
+          </a:prstGeom>
+          <a:noFill/>
+          <a:ln>
+            <a:noFill/>
+          </a:ln>
+          <a:extLst>
+            <a:ext uri="{909E8E84-426E-40DD-AFC4-6F175D3DCCD1}">
+              <a14:hiddenFill xmlns:a14="http://schemas.microsoft.com/office/drawing/2010/main">
+                <a:solidFill>
+                  <a:srgbClr val="FFFFFF"/>
+                </a:solidFill>
+              </a14:hiddenFill>
+            </a:ext>
+            <a:ext uri="{91240B29-F687-4F45-9708-019B960494DF}">
+              <a14:hiddenLine xmlns:a14="http://schemas.microsoft.com/office/drawing/2010/main" w="9525">
+                <a:solidFill>
+                  <a:srgbClr val="000000"/>
+                </a:solidFill>
+                <a:miter lim="800000"/>
+                <a:headEnd/>
+                <a:tailEnd/>
+              </a14:hiddenLine>
+            </a:ext>
+          </a:extLst>
+        </p:spPr>
+      </p:pic>
+      <p:sp>
+        <p:nvSpPr>
+          <p:cNvPr id="4" name="날짜 개체 틀 3">
+            <a:extLst>
+              <a:ext uri="{FF2B5EF4-FFF2-40B4-BE49-F238E27FC236}">
+                <a16:creationId xmlns:a16="http://schemas.microsoft.com/office/drawing/2014/main" id="{7173189A-A930-FADB-F70D-C32B0B49DC27}"/>
+              </a:ext>
+            </a:extLst>
+          </p:cNvPr>
+          <p:cNvSpPr>
+            <a:spLocks noGrp="1"/>
+          </p:cNvSpPr>
+          <p:nvPr>
+            <p:ph type="dt" sz="half" idx="10"/>
+          </p:nvPr>
+        </p:nvSpPr>
+        <p:spPr/>
+        <p:txBody>
+          <a:bodyPr/>
+          <a:lstStyle/>
+          <a:p>
+            <a:pPr>
+              <a:defRPr/>
+            </a:pPr>
+            <a:r>
+              <a:rPr lang="en-US" altLang="ko-KR"/>
+              <a:t>2008</a:t>
+            </a:r>
+            <a:r>
+              <a:rPr lang="ko-KR" altLang="en-US"/>
+              <a:t>년</a:t>
+            </a:r>
+            <a:r>
+              <a:rPr lang="en-US" altLang="ko-KR"/>
+              <a:t>2</a:t>
+            </a:r>
+            <a:r>
+              <a:rPr lang="ko-KR" altLang="en-US"/>
+              <a:t>학기 </a:t>
+            </a:r>
+            <a:r>
+              <a:rPr lang="en-US" altLang="ko-KR"/>
+              <a:t>3D</a:t>
+            </a:r>
+            <a:r>
+              <a:rPr lang="ko-KR" altLang="en-US"/>
+              <a:t>게임프로그래밍</a:t>
+            </a:r>
+            <a:r>
+              <a:rPr lang="en-US" altLang="ko-KR"/>
+              <a:t>II </a:t>
+            </a:r>
+            <a:r>
+              <a:rPr lang="ko-KR" altLang="en-US"/>
+              <a:t>담당교수</a:t>
+            </a:r>
+            <a:r>
+              <a:rPr lang="en-US" altLang="ko-KR"/>
+              <a:t>:</a:t>
+            </a:r>
+            <a:r>
+              <a:rPr lang="ko-KR" altLang="en-US"/>
+              <a:t>김영식</a:t>
+            </a:r>
+          </a:p>
+        </p:txBody>
+      </p:sp>
+      <p:sp>
+        <p:nvSpPr>
+          <p:cNvPr id="5" name="슬라이드 번호 개체 틀 4">
+            <a:extLst>
+              <a:ext uri="{FF2B5EF4-FFF2-40B4-BE49-F238E27FC236}">
+                <a16:creationId xmlns:a16="http://schemas.microsoft.com/office/drawing/2014/main" id="{2C2D7E51-BEA6-A2D6-8DA0-D9AD3243621E}"/>
+              </a:ext>
+            </a:extLst>
+          </p:cNvPr>
+          <p:cNvSpPr>
+            <a:spLocks noGrp="1"/>
+          </p:cNvSpPr>
+          <p:nvPr>
+            <p:ph type="sldNum" sz="quarter" idx="12"/>
+          </p:nvPr>
+        </p:nvSpPr>
+        <p:spPr/>
+        <p:txBody>
+          <a:bodyPr/>
+          <a:lstStyle/>
+          <a:p>
+            <a:pPr>
+              <a:defRPr/>
+            </a:pPr>
+            <a:fld id="{A268DA64-E15D-4814-A1DA-86D92D550423}" type="slidenum">
+              <a:rPr lang="ko-KR" altLang="en-US" smtClean="0"/>
+              <a:pPr>
+                <a:defRPr/>
+              </a:pPr>
+              <a:t>17</a:t>
+            </a:fld>
+            <a:endParaRPr lang="ko-KR" altLang="en-US"/>
+          </a:p>
+        </p:txBody>
+      </p:sp>
+      <p:pic>
+        <p:nvPicPr>
+          <p:cNvPr id="9" name="그림 8">
+            <a:extLst>
+              <a:ext uri="{FF2B5EF4-FFF2-40B4-BE49-F238E27FC236}">
+                <a16:creationId xmlns:a16="http://schemas.microsoft.com/office/drawing/2014/main" id="{7A9294D8-94C6-64C8-0F61-124FAB2F67F2}"/>
+              </a:ext>
+            </a:extLst>
+          </p:cNvPr>
+          <p:cNvPicPr>
+            <a:picLocks noChangeAspect="1"/>
+          </p:cNvPicPr>
+          <p:nvPr/>
+        </p:nvPicPr>
+        <p:blipFill>
+          <a:blip r:embed="rId3"/>
+          <a:stretch>
+            <a:fillRect/>
+          </a:stretch>
+        </p:blipFill>
+        <p:spPr>
+          <a:xfrm>
+            <a:off x="5292080" y="972109"/>
+            <a:ext cx="1930387" cy="5350434"/>
+          </a:xfrm>
+          <a:prstGeom prst="rect">
+            <a:avLst/>
+          </a:prstGeom>
+        </p:spPr>
+      </p:pic>
+    </p:spTree>
+    <p:extLst>
+      <p:ext uri="{BB962C8B-B14F-4D97-AF65-F5344CB8AC3E}">
+        <p14:creationId xmlns:p14="http://schemas.microsoft.com/office/powerpoint/2010/main" val="2780306255"/>
       </p:ext>
     </p:extLst>
   </p:cSld>
